--- a/docs/ABDURRAHMAAN_IT402_DEL_3_PRESENTATION.pptx
+++ b/docs/ABDURRAHMAAN_IT402_DEL_3_PRESENTATION.pptx
@@ -823,7 +823,7 @@
           <a:lstStyle/>
           <a:p>
             <a:r>
-              <a:t>Hello. My name is Abdurrahmaan Ali, and today I'm presenting RentalPro, a Digital Rental Management System built across my IT401 and IT402 capstone courses. Over the next few minutes I'll walk through the problem this system solves, how it was designed and built, and the results of testing it — including a live demo of the working application. All six project deliverables — requirements, design, the working prototype, the full project report, 100% feature completion, and the final demo and presentation package — are finished, tested, and documented. Since then, I've also extended the system with a full billing engine, and made it more usable for Harare landlords and tenants, including a choice of English, Shona and Arabic. Most recently, I translated every screen, message and document into Arabic and hardened the system for production — I'll cover all three.</a:t>
+              <a:t>Hello. My name is Abdur-Rahmaan Muhammad Ali, and today I'm presenting RentalPro, a Digital Rental Management System built across my IT401 and IT402 capstone courses. Over the next few minutes I'll walk through the problem this system solves, how it was designed and built, and the results of testing it — including a demo of the working application. All six project deliverables — requirements, design, the working prototype, the full project report, 100% feature completion, and the final demo and presentation package — are finished, tested, and documented. Beyond the original requirements, I've also extended the system with a full billing engine, and made it more usable for Harare landlords and tenants, including a choice of English, Shona and Arabic. Most recently, I translated every screen, message and document into Arabic and hardened the system for production — I'll cover all three.</a:t>
             </a:r>
           </a:p>
         </p:txBody>
@@ -909,7 +909,7 @@
           <a:lstStyle/>
           <a:p>
             <a:r>
-              <a:t>This is the slide that backs up every claim in this presentation. 305 automated tests, zero failures, 86 percent statement coverage across the backend, and all 25 use cases from the SRS covered by at least one test. The chart breaks that down by module — 36 validation tests, 31 for IT402 Deliverable 2's feature gaps, 79 for the billing engine alone, the single largest block in the project, 22 for the property map and the three languages, 13 for the tenant history and maintenance summary screens that completed the last two requirements, and 54 for the final round — full Arabic, security headers, migrations, currency and cloud storage — and 7 for the Render deployment. Importantly, these aren't unit tests calling isolated functions — they go through Flask's real test client, issuing actual HTTP requests through session handling, CSRF, RBAC, and the ORM. That's how a real security bug like cross-owner data access — one Property Owner querying another Owner's property — gets caught before it ships, not after.</a:t>
+              <a:t>This is the slide that backs up every claim in this presentation. 305 automated tests, zero failures, 86 percent statement coverage across the backend, and all 25 use cases from the SRS covered by at least one test. The chart breaks that down by module — 36 validation tests, 31 for IT402 Deliverable 2's feature gaps, 79 for the billing engine alone, the single largest block in the project, 22 for the property map and the three languages, 13 for the tenant history and maintenance summary screens that completed two of the last three requirements, and 54 for the final round — full Arabic, security headers, migrations, currency and cloud storage — and 7 for the Render deployment. Importantly, these aren't unit tests calling isolated functions — they go through Flask's real test client, issuing actual HTTP requests through session handling, CSRF, RBAC, and the ORM. That's how a real security bug like cross-owner data access — one Property Owner querying another Owner's property — gets caught before it ships, not after.</a:t>
             </a:r>
           </a:p>
         </p:txBody>
@@ -996,7 +996,7 @@
           <a:p>
             <a:r>
               <a:rPr lang="en-US" dirty="0"/>
-              <a:t>Now let's see it running. I'll walk through six things: first, an Owner setting up a property and unit with photos and a configured late fee. Second, onboarding a new tenant, uploading their lease, and watching the unit activate. Third, the IT402 Deliverable 2 blacklist toggle and recording a rent payment. Fourth, a full maintenance ticket lifecycle rotating through four different role logins — tenant submits, owner assigns, staff completes, tenant confirms. Fifth, the admin console for user management and creating a new staff account. And finally, the billing engine end to end — charges, metering, pro rata, a rent revision, the automated billing job's paper trail, a filtered account statement, a downloaded payment receipt, and a property expense feeding into net income — and to finish, the Harare portfolio on the map and the whole interface switching to Shona, then to Arabic, laid out right to left, and back to English. [Switch to the recorded demo video or live application here.]</a:t>
+              <a:t>Now let's see it running. The demo video walks through six things. First, the administrator's Harare portfolio: the dashboard, the five properties, and the portfolio map. Second, the tenants list and the rent tracker, where a cash payment clears a tenant's arrears and gets a receipt number and an audit-log entry. Third, an assigned maintenance ticket, and the reports page with rent collected, expenses and net income for each property. Fourth, the language menu: the whole interface switches to Shona, then to Arabic, laid out right to left, and the choice is remembered on the login page and on the account. Fifth, a tenant's portal in Shona, then, as the owner, the tenant history of a unit and the maintenance summary, the two screens added after IT402 Deliverable 2. And finally, the property manager working in Arabic: a tenant profile, a rent statement with charges, the meter and rent revisions, a payment confirmation, and the statement as an Arabic PDF.</a:t>
             </a:r>
             <a:endParaRPr lang="en-US" dirty="0"/>
           </a:p>
@@ -2113,7 +2113,7 @@
           <a:lstStyle/>
           <a:p>
             <a:r>
-              <a:t>The application is a layered Flask monolith — deliberately simplified from IT401 Deliverable 2's more ambitious microservice sketch, because a single developer needed to build and verify it in the time available. Presentation is 40 Jinja2 templates behind a role-aware top navigation bar, with a language menu for English, Shona and Arabic. The application layer is 10 Flask Blueprints — one each for auth, properties, tenants, rent, maintenance, admin, reports, the tenant portal, and the REST API. Below that, the domain and service layer holds security.py for RBAC and IDOR protection, web_security.py for the security headers and the secret-key check, the five scheduler jobs, a small translation module for Shona and Arabic, which also turns Arabic pages right to left, and a services package for PDF generation, Excel export, notifications, and payments. Data is 18 SQLAlchemy models — the 13 from the design plus 5 for the billing engine — with UUID keys, and the schema is managed by Alembic migrations. And infrastructure is Docker Compose running PostgreSQL and Redis, with uploads kept on local disk or in an S3-compatible bucket, with a dev-mode fallback for every paid external service — which is what let me build and test this entire system without a single paid account.</a:t>
+              <a:t>The application is a layered Flask monolith — deliberately simplified from IT401 Deliverable 2's more ambitious microservice sketch, because a single developer needed to build and verify it in the time available. Presentation is 40 Jinja2 templates behind a role-aware top navigation bar, with a language menu for English, Shona and Arabic. The application layer is 10 Flask Blueprints — one each for auth, the dashboards, properties, tenants, rent, maintenance, admin, reports, the tenant portal, and the REST API. Below that, the domain and service layer holds security.py for RBAC and IDOR protection, web_security.py for the security headers and the secret-key check, the five scheduler jobs, a small translation module for Shona and Arabic, which also turns Arabic pages right to left, and a services package for PDF generation, Excel export, notifications, and payments. Data is 18 SQLAlchemy models — the 13 from the design plus 5 for the billing engine — with UUID keys, and the schema is managed by Alembic migrations. And infrastructure is Docker Compose running PostgreSQL and Redis, with uploads kept on local disk or in an S3-compatible bucket, with a dev-mode fallback for every paid external service — which is what let me build and test this entire system without a single paid account.</a:t>
             </a:r>
           </a:p>
         </p:txBody>
@@ -2287,7 +2287,7 @@
           <a:lstStyle/>
           <a:p>
             <a:r>
-              <a:t>IT402 Deliverable 2 is where the project went from working to 100% complete against the original requirements. An audit found eleven gaps, grouped on this slide into eight areas: photo uploads for properties, units, and maintenance tickets, all validated by their actual file content, not just the extension; editing a unit after it's created; configurable late fees, fixed or percentage, applied automatically once rent is overdue; tenant blacklisting, which blocks a future lease without touching an existing one; tenant ID documents and lease document downloads; the admin user console, with a safety guard that won't let you remove the last active Owner; self-service staff account creation; and one-click CSV and Excel exports. All eleven are covered by a dedicated 31-test module, which I'll show numbers for next. When I later traced all 44 functional requirements one by one, two were only partly met — the full tenant history of each unit, and a maintenance summary by period — so I built both, and all 44 requirements are now met.</a:t>
+              <a:t>IT402 Deliverable 2 is where the project went from working to 100% complete against the original requirements. An audit found eleven gaps, grouped on this slide into eight areas: photo uploads for properties, units, and maintenance tickets, all validated by their actual file content, not just the extension; editing a unit after it's created; configurable late fees, fixed or percentage, applied automatically once rent is overdue; tenant blacklisting, which blocks a future lease without touching an existing one; tenant ID documents and lease document downloads; the admin user console, with a safety guard that won't let you remove the last active Owner; self-service staff account creation; and one-click CSV and Excel exports. All eleven are covered by a dedicated 31-test module, which I'll show numbers for next. When I later traced all 44 functional requirements one by one, two were only partly met — the full tenant history of each unit, and a maintenance summary by period — and the interface languages weren't built yet. I built all three, and all 44 requirements are now met.</a:t>
             </a:r>
           </a:p>
         </p:txBody>
@@ -3008,7 +3008,7 @@
                 <a:ea typeface="Calibri" pitchFamily="34" charset="-122"/>
                 <a:cs typeface="Calibri" pitchFamily="34" charset="-120"/>
               </a:rPr>
-              <a:t>Presented by: Abdurrahmaan Ali</a:t>
+              <a:t>Presented by: Abdur-Rahmaan Muhammad Ali</a:t>
             </a:r>
             <a:endParaRPr lang="en-US" sz="1300" dirty="0"/>
           </a:p>
@@ -7450,7 +7450,7 @@
                 <a:ea typeface="Cambria" pitchFamily="34" charset="-122"/>
                 <a:cs typeface="Cambria" pitchFamily="34" charset="-120"/>
               </a:rPr>
-              <a:t>Live Demo</a:t>
+              <a:t>Application Demo</a:t>
             </a:r>
             <a:endParaRPr lang="en-US" sz="4800" dirty="0"/>
           </a:p>
@@ -7489,7 +7489,7 @@
                 <a:ea typeface="Calibri" pitchFamily="34" charset="-122"/>
                 <a:cs typeface="Calibri" pitchFamily="34" charset="-120"/>
               </a:rPr>
-              <a:t>A walkthrough of the running application</a:t>
+              <a:t>The recorded walkthrough of the running application</a:t>
             </a:r>
             <a:endParaRPr lang="en-US" sz="1600" dirty="0"/>
           </a:p>
@@ -7591,7 +7591,7 @@
                 <a:ea typeface="Calibri" pitchFamily="34" charset="-122"/>
                 <a:cs typeface="Calibri" pitchFamily="34" charset="-120"/>
               </a:rPr>
-              <a:t>Owner: property &amp; unit setup, photos, and a configured late fee</a:t>
+              <a:t>Admin: the Harare dashboard, properties and the portfolio map</a:t>
             </a:r>
             <a:endParaRPr lang="en-US" sz="1350" dirty="0"/>
           </a:p>
@@ -7693,7 +7693,7 @@
                 <a:ea typeface="Calibri" pitchFamily="34" charset="-122"/>
                 <a:cs typeface="Calibri" pitchFamily="34" charset="-120"/>
               </a:rPr>
-              <a:t>Owner: onboard a tenant, upload a lease, activate the tenancy</a:t>
+              <a:t>Rent tracker: a cash payment clears a tenant’s arrears</a:t>
             </a:r>
             <a:endParaRPr lang="en-US" sz="1350" dirty="0"/>
           </a:p>
@@ -7795,7 +7795,7 @@
                 <a:ea typeface="Calibri" pitchFamily="34" charset="-122"/>
                 <a:cs typeface="Calibri" pitchFamily="34" charset="-120"/>
               </a:rPr>
-              <a:t>Owner: blacklist / unblacklist, record a rent payment</a:t>
+              <a:t>A maintenance ticket, and net income for each property</a:t>
             </a:r>
             <a:endParaRPr lang="en-US" sz="1350" dirty="0"/>
           </a:p>
@@ -7897,7 +7897,7 @@
                 <a:ea typeface="Calibri" pitchFamily="34" charset="-122"/>
                 <a:cs typeface="Calibri" pitchFamily="34" charset="-120"/>
               </a:rPr>
-              <a:t>Tenant → Owner → Staff → Tenant: full maintenance lifecycle</a:t>
+              <a:t>English → Shona → Arabic, right to left, and remembered</a:t>
             </a:r>
             <a:endParaRPr lang="en-US" sz="1350" dirty="0"/>
           </a:p>
@@ -7999,7 +7999,7 @@
                 <a:ea typeface="Calibri" pitchFamily="34" charset="-122"/>
                 <a:cs typeface="Calibri" pitchFamily="34" charset="-120"/>
               </a:rPr>
-              <a:t>Admin: user management and staff account creation</a:t>
+              <a:t>Tenant portal in Shona; unit history and maintenance summary</a:t>
             </a:r>
             <a:endParaRPr lang="en-US" sz="1350" dirty="0"/>
           </a:p>
@@ -8101,7 +8101,7 @@
                 <a:ea typeface="Calibri" pitchFamily="34" charset="-122"/>
                 <a:cs typeface="Calibri" pitchFamily="34" charset="-120"/>
               </a:rPr>
-              <a:t>Billing engine, then the Harare map and the language menu</a:t>
+              <a:t>Manager in Arabic: profile, statement, messages and PDF</a:t>
             </a:r>
             <a:endParaRPr lang="en-US" sz="1350" dirty="0"/>
           </a:p>
@@ -8140,7 +8140,7 @@
                 <a:ea typeface="Calibri" pitchFamily="34" charset="-122"/>
                 <a:cs typeface="Calibri" pitchFamily="34" charset="-120"/>
               </a:rPr>
-              <a:t>Live Demo</a:t>
+              <a:t>Application Demo</a:t>
             </a:r>
             <a:endParaRPr lang="en-US" sz="1000" dirty="0"/>
           </a:p>
@@ -8659,7 +8659,7 @@
                 <a:ea typeface="Calibri" pitchFamily="34" charset="-122"/>
                 <a:cs typeface="Calibri" pitchFamily="34" charset="-120"/>
               </a:rPr>
-              <a:t>Wrote the edge-case tests first (mid-month start, day-29 clipping) before trusting the due-date calculation</a:t>
+              <a:t>Wrote the edge-case tests first (mid-month start, day-31-in-February clipping) before trusting the due-date calculation</a:t>
             </a:r>
             <a:endParaRPr lang="en-US" sz="1200" dirty="0"/>
           </a:p>
@@ -14924,7 +14924,7 @@
                 <a:ea typeface="Cambria" pitchFamily="34" charset="-122"/>
                 <a:cs typeface="Cambria" pitchFamily="34" charset="-120"/>
               </a:rPr>
-              <a:t>3 use cases</a:t>
+              <a:t>4 use cases</a:t>
             </a:r>
             <a:endParaRPr lang="en-US" sz="1800" dirty="0"/>
           </a:p>
@@ -15079,7 +15079,7 @@
                 <a:ea typeface="Cambria" pitchFamily="34" charset="-122"/>
                 <a:cs typeface="Cambria" pitchFamily="34" charset="-120"/>
               </a:rPr>
-              <a:t>4 use cases</a:t>
+              <a:t>5 use cases</a:t>
             </a:r>
             <a:endParaRPr lang="en-US" sz="1800" dirty="0"/>
           </a:p>
@@ -17177,7 +17177,7 @@
                 <a:ea typeface="Calibri" pitchFamily="34" charset="-122"/>
                 <a:cs typeface="Calibri" pitchFamily="34" charset="-120"/>
               </a:rPr>
-              <a:t>10 Blueprints — auth, properties, tenants, rent, maintenance, admin, reports, portal, api</a:t>
+              <a:t>10 Blueprints — auth, dashboard, properties, tenants, rent, maintenance, admin, reports, portal, api</a:t>
             </a:r>
             <a:endParaRPr lang="en-US" sz="1150" dirty="0"/>
           </a:p>
@@ -20503,7 +20503,7 @@
                 <a:ea typeface="Calibri" pitchFamily="34" charset="-122"/>
                 <a:cs typeface="Calibri" pitchFamily="34" charset="-120"/>
               </a:rPr>
-              <a:t>Eight further billing capabilities added after the first demo package, going beyond the original SRS — 79 additional tests, all passing.</a:t>
+              <a:t>Eight further billing capabilities going beyond the original SRS — 79 additional tests, all passing.</a:t>
             </a:r>
             <a:endParaRPr lang="en-US" sz="1350" dirty="0"/>
           </a:p>
